--- a/assets/pptx/catalog-686.pptx
+++ b/assets/pptx/catalog-686.pptx
@@ -3295,7 +3295,7 @@
                 <a:ea typeface="Ebrima"/>
                 <a:cs typeface="Ebrima"/>
               </a:rPr>
-              <a:t>ጌታዬ ታማኝ ነው (2x)</a:t>
+              <a:t>ጌታዬ ታማኝ ነው 2x</a:t>
             </a:r>
           </a:p>
           <a:p>
@@ -3475,7 +3475,7 @@
                 <a:ea typeface="Ebrima"/>
                 <a:cs typeface="Ebrima"/>
               </a:rPr>
-              <a:t>እስቲ አምላኳ ያርግ አሉ ዛቱብኝ (2x)</a:t>
+              <a:t>እስቲ አምላኳ ያርግ አሉ ዛቱብኝ 2x</a:t>
             </a:r>
           </a:p>
           <a:p>
@@ -3511,7 +3511,7 @@
                 <a:ea typeface="Ebrima"/>
                 <a:cs typeface="Ebrima"/>
               </a:rPr>
-              <a:t>በሚያሳይበት ሰርቶ አሳየ (2x)</a:t>
+              <a:t>በሚያሳይበት ሰርቶ አሳየ 2x</a:t>
             </a:r>
           </a:p>
           <a:p>
@@ -3547,7 +3547,7 @@
                 <a:ea typeface="Ebrima"/>
                 <a:cs typeface="Ebrima"/>
               </a:rPr>
-              <a:t>በሚያሳይበት ሰርቶ አሳየ (2x)</a:t>
+              <a:t>በሚያሳይበት ሰርቶ አሳየ 2x</a:t>
             </a:r>
           </a:p>
           <a:p>
@@ -3727,7 +3727,7 @@
                 <a:ea typeface="Ebrima"/>
                 <a:cs typeface="Ebrima"/>
               </a:rPr>
-              <a:t>እስራቴን ፈትቶ ሲለቀኝ ነው (2x)</a:t>
+              <a:t>እስራቴን ፈትቶ ሲለቀኝ ነው 2x</a:t>
             </a:r>
           </a:p>
           <a:p>
@@ -3781,7 +3781,7 @@
                 <a:ea typeface="Ebrima"/>
                 <a:cs typeface="Ebrima"/>
               </a:rPr>
-              <a:t>እርሱ ታማኝ ነው (2x)</a:t>
+              <a:t>እርሱ ታማኝ ነው 2x</a:t>
             </a:r>
           </a:p>
           <a:p>
